--- a/qsbg_smart_tour_presentation_formal.pptx
+++ b/qsbg_smart_tour_presentation_formal.pptx
@@ -8119,7 +8119,7 @@
               </a:defRPr>
             </a:pPr>
             <a:r>
-              <a:t>ขาดข้อมูลเชิงสถิติเพื่อการวางแผน</a:t>
+              <a:t>การบูรณาการข้อมูลองค์กรสมัยใหม่</a:t>
             </a:r>
           </a:p>
           <a:p>
@@ -8135,7 +8135,7 @@
               </a:defRPr>
             </a:pPr>
             <a:r>
-              <a:t>No Data-Driven Analytics</a:t>
+              <a:t>Holistic Data Integration for Modern Governance</a:t>
             </a:r>
           </a:p>
           <a:p>
@@ -8151,7 +8151,7 @@
               </a:defRPr>
             </a:pPr>
             <a:r>
-              <a:t>• ขาดระบบจัดเก็บข้อมูลการใช้บริการในรูปแบบดิจิทัล</a:t>
+              <a:t>• การพัฒนาองค์กรสมัยใหม่บนพื้นฐานเทคโนโลยีดิจิทัล ต้องการระบบจัดเก็บและบูรณาการข้อมูลแบบองค์รวม</a:t>
             </a:r>
           </a:p>
           <a:p>
@@ -8167,7 +8167,7 @@
               </a:defRPr>
             </a:pPr>
             <a:r>
-              <a:t>• ไม่มีข้อมูลเชิงพื้นที่และเวลา (Spatial Data) วิเคราะห์จุดหนาแน่น</a:t>
+              <a:t>• ข้อมูลต้องมีความถูกต้อง แม่นยำ เป็นปัจจุบัน และเรียกใช้ได้ตลอดเวลาในทุกแพลตฟอร์ม</a:t>
             </a:r>
           </a:p>
           <a:p>
@@ -8183,7 +8183,7 @@
               </a:defRPr>
             </a:pPr>
             <a:r>
-              <a:t>• ผู้บริหารไม่สามารถนำข้อมูลมาใช้วางแผนจัดสรรทรัพยากรได้อย่างแม่นยำ</a:t>
+              <a:t>• เชื่อมโยงข้อมูลการเดินรถ การจำหน่ายตั๋ว และการบริการเข้าสู่ฐานข้อมูลศูนย์กลาง</a:t>
             </a:r>
           </a:p>
           <a:p>
@@ -8199,7 +8199,7 @@
               </a:defRPr>
             </a:pPr>
             <a:r>
-              <a:t>• ระบบจำหน่ายตั๋วและการตรวจสอบยังไม่เชื่อมโยงกับฐานข้อมูลกลาง</a:t>
+              <a:t>• สนับสนุนการนำข้อมูลเชิงพื้นที่ (Spatial Data) มาวิเคราะห์เพื่อการวางแผนเชิงรุก</a:t>
             </a:r>
           </a:p>
         </p:txBody>

--- a/qsbg_smart_tour_presentation_formal.pptx
+++ b/qsbg_smart_tour_presentation_formal.pptx
@@ -7726,8 +7726,8 @@
         </p:nvSpPr>
         <p:spPr>
           <a:xfrm>
-            <a:off x="960120" y="1920240"/>
-            <a:ext cx="2871216" cy="4023360"/>
+            <a:off x="896112" y="1874520"/>
+            <a:ext cx="2999232" cy="4114800"/>
           </a:xfrm>
           <a:prstGeom prst="rect">
             <a:avLst/>
@@ -7735,7 +7735,7 @@
           <a:noFill/>
         </p:spPr>
         <p:txBody>
-          <a:bodyPr wrap="square">
+          <a:bodyPr wrap="square" lIns="73152" rIns="73152">
             <a:spAutoFit/>
           </a:bodyPr>
           <a:lstStyle/>
@@ -7757,7 +7757,7 @@
           </a:p>
           <a:p>
             <a:pPr>
-              <a:defRPr sz="1700" b="1">
+              <a:defRPr sz="1350" b="1">
                 <a:solidFill>
                   <a:srgbClr val="14181B"/>
                 </a:solidFill>
@@ -7903,8 +7903,8 @@
         </p:nvSpPr>
         <p:spPr>
           <a:xfrm>
-            <a:off x="4617720" y="1920240"/>
-            <a:ext cx="2871216" cy="4023360"/>
+            <a:off x="4553712" y="1874520"/>
+            <a:ext cx="2999232" cy="4114800"/>
           </a:xfrm>
           <a:prstGeom prst="rect">
             <a:avLst/>
@@ -7912,7 +7912,7 @@
           <a:noFill/>
         </p:spPr>
         <p:txBody>
-          <a:bodyPr wrap="square">
+          <a:bodyPr wrap="square" lIns="73152" rIns="73152">
             <a:spAutoFit/>
           </a:bodyPr>
           <a:lstStyle/>
@@ -7934,7 +7934,7 @@
           </a:p>
           <a:p>
             <a:pPr>
-              <a:defRPr sz="1700" b="1">
+              <a:defRPr sz="1350" b="1">
                 <a:solidFill>
                   <a:srgbClr val="14181B"/>
                 </a:solidFill>
@@ -8080,8 +8080,8 @@
         </p:nvSpPr>
         <p:spPr>
           <a:xfrm>
-            <a:off x="8275320" y="1920240"/>
-            <a:ext cx="2871216" cy="4023360"/>
+            <a:off x="8211312" y="1874520"/>
+            <a:ext cx="2999232" cy="4114800"/>
           </a:xfrm>
           <a:prstGeom prst="rect">
             <a:avLst/>
@@ -8089,7 +8089,7 @@
           <a:noFill/>
         </p:spPr>
         <p:txBody>
-          <a:bodyPr wrap="square">
+          <a:bodyPr wrap="square" lIns="73152" rIns="73152">
             <a:spAutoFit/>
           </a:bodyPr>
           <a:lstStyle/>
@@ -8111,7 +8111,7 @@
           </a:p>
           <a:p>
             <a:pPr>
-              <a:defRPr sz="1700" b="1">
+              <a:defRPr sz="1350" b="1">
                 <a:solidFill>
                   <a:srgbClr val="14181B"/>
                 </a:solidFill>
@@ -8119,7 +8119,11 @@
               </a:defRPr>
             </a:pPr>
             <a:r>
-              <a:t>การบูรณาการข้อมูลองค์กรสมัยใหม่</a:t>
+              <a:t>การพัฒนาองค์กรสมัยใหม่</a:t>
+            </a:r>
+            <a:br/>
+            <a:r>
+              <a:t>บนพื้นฐานเทคโนโลยีดิจิทัล</a:t>
             </a:r>
           </a:p>
           <a:p>
@@ -8135,7 +8139,7 @@
               </a:defRPr>
             </a:pPr>
             <a:r>
-              <a:t>Holistic Data Integration for Modern Governance</a:t>
+              <a:t>Modern Digital Organization</a:t>
             </a:r>
           </a:p>
           <a:p>
@@ -8151,7 +8155,7 @@
               </a:defRPr>
             </a:pPr>
             <a:r>
-              <a:t>• การพัฒนาองค์กรสมัยใหม่บนพื้นฐานเทคโนโลยีดิจิทัล ต้องการระบบจัดเก็บและบูรณาการข้อมูลแบบองค์รวม</a:t>
+              <a:t>• ต้องการระบบจัดเก็บและบูรณาการข้อมูลแบบองค์รวม</a:t>
             </a:r>
           </a:p>
           <a:p>
